--- a/presentations/m5-session-2-models-context-tools-and-skills.pptx
+++ b/presentations/m5-session-2-models-context-tools-and-skills.pptx
@@ -800,7 +800,7 @@
           <a:lstStyle/>
           <a:p>
             <a:r>
-              <a:t>Run this cell live: the notebook prints the message count after each question and the compaction note itself. Point at the note: it names which tools ran and what came back, so the model can still answer follow-ups. Class question: what would you lose if the compaction summary were just 'earlier conversation omitted'?</a:t>
+              <a:t>Run this cell live: the notebook prints the message count after each question and the compaction note itself. Point at the note: it names which tools ran and what came back, so the model can still answer follow-ups. These counts are the reference run on the stand-in; on live Claude the budget check fires at a different point because real answers have different lengths. Class question: what would you lose if the compaction summary were just 'earlier conversation omitted'?</a:t>
             </a:r>
           </a:p>
         </p:txBody>
@@ -940,7 +940,7 @@
           <a:lstStyle/>
           <a:p>
             <a:r>
-              <a:t>Notebook 02 runs both against the ScriptedModel and prints the two traces side by side. The vague tool wastes the budget on whole documents and gives the model nothing to decide with. Class question: which of the four differences would you fix first if you could only fix one?</a:t>
+              <a:t>Notebook 02 runs both and prints the two traces side by side: the reference run on the stand-in gives the exact numbers, the live Claude run shows the same contrast with real tokens. The vague tool wastes the budget on whole documents and gives the model nothing to decide with. Class question: which of the four differences would you fix first if you could only fix one?</a:t>
             </a:r>
           </a:p>
         </p:txBody>
@@ -1010,7 +1010,7 @@
           <a:lstStyle/>
           <a:p>
             <a:r>
-              <a:t>Read the message aloud: it names the tool, the risk level and the decision, and it goes back to the model so the loop can continue. Then flip permission to allow_all and show the same call running. The approval paradox is the reason defaults matter: when a human is asked, they say yes 93% of the time. Class question: which tools in your own projects deserve the 'danger' label?</a:t>
+              <a:t>Read the message aloud: it names the tool, the risk level and the decision, and it goes back to the model so the loop can continue. Then flip permission to allow_all and show the same call running. The approval paradox is the reason defaults matter: when a human is asked, they say yes 93% of the time. The denial is the one output that does not change between the stand-in and live Claude: it never reaches the model. Class question: which tools in your own projects deserve the 'danger' label?</a:t>
             </a:r>
           </a:p>
         </p:txBody>
@@ -1080,7 +1080,7 @@
           <a:lstStyle/>
           <a:p>
             <a:r>
-              <a:t>This is exactly what the agent sees at startup: three lines, 98 tokens. When a question asks for a fact, the cite-sources description matches and the body loads - the five numbered steps of search, read, draft, check, reply. Class question: which of the three descriptions would you rewrite, and why?</a:t>
+              <a:t>This is exactly what the agent sees at startup: three lines, 98 tokens. When a question asks for a fact, the cite-sources description matches and the body loads - the five numbered steps of search, read, draft, check, reply. The catalog and body sizes are fixed; only the run-level token cost changes on live Claude. Class question: which of the three descriptions would you rewrite, and why?</a:t>
             </a:r>
           </a:p>
         </p:txBody>
@@ -1150,7 +1150,7 @@
           <a:lstStyle/>
           <a:p>
             <a:r>
-              <a:t>End of the notebook, and the payoff of the interface slide: the harness does not change when the engine does. If a student has a key, they paste it into a hidden prompt and run the same cells. Repeat the repository rule: no key is ever stored or committed. Class question: what would you compare between the scripted and the real run to judge the harness, not the model?</a:t>
+              <a:t>The payoff of the interface slide: the harness does not change when the engine does. Every notebook calls model_for(role); with a key in .env it returns real Claude and the same cells run live, printing real token usage; without one it returns the stand-in, which is where every exact number in this deck comes from. Repeat the repository rule: the key lives in .env, never in a cell, never in git. Class question: what would you compare between the stand-in run and the live run to judge the harness, not the model?</a:t>
             </a:r>
           </a:p>
         </p:txBody>
@@ -1360,7 +1360,7 @@
           <a:lstStyle/>
           <a:p>
             <a:r>
-              <a:t>Start with the contract, not the vendor. A model takes the system prompt, the messages so far and the tool schemas, and returns one message: text, or a request to call a tool. That is all a harness needs to know. Our ScriptedModel implements the same contract with a hand-written policy, so the notebooks run without a key and give the same answer every time. Class question: which of the three inputs would you expect to grow the most during a long task?</a:t>
+              <a:t>Start with the contract, not the vendor. A model takes the system prompt, the messages so far and the tool schemas, and returns one message: text, or a request to call a tool. That is all a harness needs to know. Our ScriptedModel implements the same contract with a hand-written policy, so the notebooks run without a key and give the same answer every time. With an ANTHROPIC_API_KEY in the git-ignored .env, model_for swaps in claude-opus-5 for the lead and research roles and claude-sonnet-5 for workers and judges; the same cells then run live. Class question: which of the three inputs would you expect to grow the most during a long task?</a:t>
             </a:r>
           </a:p>
         </p:txBody>
@@ -7307,7 +7307,7 @@
                 </a:solidFill>
                 <a:latin typeface="Arial"/>
               </a:rPr>
-              <a:t>Counts from notebook 02 (deterministic ScriptedModel). Technique: Anthropic, Effective context engineering for AI agents, 29 Sep 2025.</a:t>
+              <a:t>Reference run on the deterministic stand-in; the live run on Claude varies and reports real tokens. Anthropic, Effective context engineering for AI agents, 29 Sep 2025.</a:t>
             </a:r>
           </a:p>
         </p:txBody>
@@ -8795,7 +8795,7 @@
                 </a:solidFill>
                 <a:latin typeface="Arial"/>
               </a:rPr>
-              <a:t>Rules: Anthropic, Writing effective tools for agents, Sep 2025. The good tool is the library's search_docs; the vague one is notebook 02's counter-example.</a:t>
+              <a:t>Rules: Anthropic, Writing effective tools for agents, Sep 2025. Traces: reference run on the deterministic stand-in; the live run on Claude varies and reports real tokens.</a:t>
             </a:r>
           </a:p>
         </p:txBody>
@@ -9559,7 +9559,7 @@
                 </a:solidFill>
                 <a:latin typeface="Arial"/>
               </a:rPr>
-              <a:t>Message text from the harness library (harness.agent), printed by notebook 02. Risk levels: read, write, danger (harness.tools.RISK_LEVELS).</a:t>
+              <a:t>Message text from harness.agent, printed by notebook 02 in the reference run on the stand-in; identical on live Claude, because the check runs outside the model. Risk levels: read, write, danger.</a:t>
             </a:r>
           </a:p>
         </p:txBody>
@@ -10280,7 +10280,7 @@
                 </a:solidFill>
                 <a:latin typeface="Arial"/>
               </a:rPr>
-              <a:t>Catalog (level 1) = 98 tokens; all three bodies (level 2) = 321 tokens, 3.3x; a run that loads a skill costs ~1,800 tokens more than a plain run. Notebook 02; Anthropic, Agent Skills, 16 Oct 2025.</a:t>
+              <a:t>Catalog 98 tokens; three bodies 321 tokens (3.3x); a skill run costs ~1,800 tokens more. Reference run on the deterministic stand-in; the live run on Claude varies and reports real tokens. Anthropic, Agent Skills, 16 Oct 2025.</a:t>
             </a:r>
           </a:p>
         </p:txBody>
@@ -10506,7 +10506,7 @@
                 </a:solidFill>
                 <a:latin typeface="Arial"/>
               </a:rPr>
-              <a:t>NOTEBOOK 02 - THE OPTIONAL REAL MODEL</a:t>
+              <a:t>NOTEBOOK 02 - THE ENGINE SWITCH</a:t>
             </a:r>
           </a:p>
         </p:txBody>
@@ -10546,7 +10546,7 @@
                 </a:solidFill>
                 <a:latin typeface="Arial"/>
               </a:rPr>
-              <a:t>The last section swaps the engine: same harness, a real model, no key stored</a:t>
+              <a:t>Two engines, one harness: Claude when a key is present, the stand-in otherwise</a:t>
             </a:r>
           </a:p>
         </p:txBody>
@@ -10674,7 +10674,7 @@
                 </a:solidFill>
                 <a:latin typeface="Arial"/>
               </a:rPr>
-              <a:t>ScriptedModel - the stand-in</a:t>
+              <a:t>The stand-in - ScriptedModel</a:t>
             </a:r>
           </a:p>
         </p:txBody>
@@ -10717,7 +10717,7 @@
                 </a:solidFill>
                 <a:latin typeface="Arial"/>
               </a:rPr>
-              <a:t>A hand-written policy decides the next message from what it sees</a:t>
+              <a:t>Used automatically when no ANTHROPIC_API_KEY is found: CI, key-less Colab</a:t>
             </a:r>
           </a:p>
           <a:p>
@@ -10737,7 +10737,7 @@
                 </a:solidFill>
                 <a:latin typeface="Arial"/>
               </a:rPr>
-              <a:t>Deterministic: same input, same output, every run, in CI and in Colab</a:t>
+              <a:t>Deterministic: the reference runs whose numbers appear on these slides</a:t>
             </a:r>
           </a:p>
           <a:p>
@@ -10757,7 +10757,7 @@
                 </a:solidFill>
                 <a:latin typeface="Arial"/>
               </a:rPr>
-              <a:t>Shows the mechanics of the loop without an account or a key</a:t>
+              <a:t>A hand-written policy decides the next message from what it sees</a:t>
             </a:r>
           </a:p>
           <a:p>
@@ -10861,7 +10861,7 @@
                 </a:solidFill>
                 <a:latin typeface="Arial"/>
               </a:rPr>
-              <a:t>A real model - optional</a:t>
+              <a:t>Real Claude - the default with a key</a:t>
             </a:r>
           </a:p>
         </p:txBody>
@@ -10904,7 +10904,7 @@
                 </a:solidFill>
                 <a:latin typeface="Arial"/>
               </a:rPr>
-              <a:t>RUN_REAL = False by default; set True to try it</a:t>
+              <a:t>model_for('research') returns claude-opus-5; workers and judges get claude-sonnet-5</a:t>
             </a:r>
           </a:p>
           <a:p>
@@ -10924,7 +10924,7 @@
                 </a:solidFill>
                 <a:latin typeface="Arial"/>
               </a:rPr>
-              <a:t>connect('anthropic') or connect('openai') asks for the key with getpass</a:t>
+              <a:t>The key lives in a git-ignored .env at the repository root (copy .env.example)</a:t>
             </a:r>
           </a:p>
           <a:p>
@@ -10944,7 +10944,7 @@
                 </a:solidFill>
                 <a:latin typeface="Arial"/>
               </a:rPr>
-              <a:t>The key lives in memory for the session and is never written anywhere</a:t>
+              <a:t>Key in .env, never in a cell, never committed - CI scans every commit for secrets</a:t>
             </a:r>
           </a:p>
           <a:p>
@@ -10964,7 +10964,7 @@
                 </a:solidFill>
                 <a:latin typeface="Arial"/>
               </a:rPr>
-              <a:t>Everything else in the notebook stays the same: tools, budget, permissions, skills</a:t>
+              <a:t>Live runs vary and print real token usage; tools, budget, permissions and skills stay the same</a:t>
             </a:r>
           </a:p>
         </p:txBody>
@@ -11004,7 +11004,7 @@
                 </a:solidFill>
                 <a:latin typeface="Arial"/>
               </a:rPr>
-              <a:t>Repository rule: no secrets ever, in code, outputs or metadata. Default models: claude-opus-5 and gpt-5 (harness.providers).</a:t>
+              <a:t>harness.runtime.model_for(role): claude-opus-5 for lead and research roles, claude-sonnet-5 for workers and judges; override with HARNESS_MODEL and HARNESS_WORKER_MODEL.</a:t>
             </a:r>
           </a:p>
         </p:txBody>
@@ -12064,7 +12064,7 @@
                 </a:solidFill>
                 <a:latin typeface="Arial"/>
               </a:rPr>
-              <a:t>The library's ScriptedModel fills the slot deterministically - no key, same output every run</a:t>
+              <a:t>The stand-in ScriptedModel fills the slot deterministically: no key, same output every run</a:t>
             </a:r>
           </a:p>
           <a:p>
@@ -12084,7 +12084,7 @@
                 </a:solidFill>
                 <a:latin typeface="Arial"/>
               </a:rPr>
-              <a:t>A real model plugs into the same slot: connect('anthropic') asks for a key with getpass, never stores it</a:t>
+              <a:t>harness.runtime.model_for(role) returns Claude when a key is present, the stand-in otherwise</a:t>
             </a:r>
           </a:p>
           <a:p>
@@ -12168,7 +12168,7 @@
                 </a:solidFill>
                 <a:latin typeface="Arial"/>
               </a:rPr>
-              <a:t>Illustration. Interface from the harness library (harness.models.Model); adapters AnthropicModel and OpenAIModel in harness.providers.</a:t>
+              <a:t>Illustration. harness.models.Model; model_for in harness.runtime. The key lives in .env, never in a cell, never committed.</a:t>
             </a:r>
           </a:p>
         </p:txBody>
